--- a/presentation/Unmask-VisionX-HF26.pptx
+++ b/presentation/Unmask-VisionX-HF26.pptx
@@ -3868,6 +3868,49 @@
           </a:p>
         </p:txBody>
       </p:sp>
+      <p:sp>
+        <p:nvSpPr>
+          <p:cNvPr id="8" name="Live site link">
+            <a:hlinkClick r:id="rId5"/>
+          </p:cNvPr>
+          <p:cNvSpPr/>
+          <p:nvPr/>
+        </p:nvSpPr>
+        <p:spPr>
+          <a:xfrm>
+            <a:off x="15451038" y="4174628"/>
+            <a:ext cx="1483221" cy="550068"/>
+          </a:xfrm>
+          <a:prstGeom prst="rect">
+            <a:avLst/>
+          </a:prstGeom>
+          <a:noFill/>
+          <a:ln>
+            <a:noFill/>
+          </a:ln>
+        </p:spPr>
+        <p:style>
+          <a:lnRef idx="1">
+            <a:schemeClr val="accent1"/>
+          </a:lnRef>
+          <a:fillRef idx="3">
+            <a:schemeClr val="accent1"/>
+          </a:fillRef>
+          <a:effectRef idx="2">
+            <a:schemeClr val="accent1"/>
+          </a:effectRef>
+          <a:fontRef idx="minor">
+            <a:schemeClr val="lt1"/>
+          </a:fontRef>
+        </p:style>
+        <p:txBody>
+          <a:bodyPr rtlCol="0" anchor="ctr"/>
+          <a:lstStyle/>
+          <a:p>
+            <a:pPr algn="ctr"/>
+          </a:p>
+        </p:txBody>
+      </p:sp>
     </p:spTree>
   </p:cSld>
   <p:clrMapOvr>
@@ -4126,6 +4169,49 @@
           </a:p>
         </p:txBody>
       </p:sp>
+      <p:sp>
+        <p:nvSpPr>
+          <p:cNvPr id="8" name="Live site link">
+            <a:hlinkClick r:id="rId5"/>
+          </p:cNvPr>
+          <p:cNvSpPr/>
+          <p:nvPr/>
+        </p:nvSpPr>
+        <p:spPr>
+          <a:xfrm>
+            <a:off x="2043112" y="8034932"/>
+            <a:ext cx="3526333" cy="491132"/>
+          </a:xfrm>
+          <a:prstGeom prst="rect">
+            <a:avLst/>
+          </a:prstGeom>
+          <a:noFill/>
+          <a:ln>
+            <a:noFill/>
+          </a:ln>
+        </p:spPr>
+        <p:style>
+          <a:lnRef idx="1">
+            <a:schemeClr val="accent1"/>
+          </a:lnRef>
+          <a:fillRef idx="3">
+            <a:schemeClr val="accent1"/>
+          </a:fillRef>
+          <a:effectRef idx="2">
+            <a:schemeClr val="accent1"/>
+          </a:effectRef>
+          <a:fontRef idx="minor">
+            <a:schemeClr val="lt1"/>
+          </a:fontRef>
+        </p:style>
+        <p:txBody>
+          <a:bodyPr rtlCol="0" anchor="ctr"/>
+          <a:lstStyle/>
+          <a:p>
+            <a:pPr algn="ctr"/>
+          </a:p>
+        </p:txBody>
+      </p:sp>
     </p:spTree>
   </p:cSld>
   <p:clrMapOvr>
@@ -4959,6 +5045,49 @@
               </a:rPr>
               <a:t>LIVE DEMO / SIMULATION RUN</a:t>
             </a:r>
+          </a:p>
+        </p:txBody>
+      </p:sp>
+      <p:sp>
+        <p:nvSpPr>
+          <p:cNvPr id="8" name="Live site link">
+            <a:hlinkClick r:id="rId5"/>
+          </p:cNvPr>
+          <p:cNvSpPr/>
+          <p:nvPr/>
+        </p:nvSpPr>
+        <p:spPr>
+          <a:xfrm>
+            <a:off x="11659492" y="8103691"/>
+            <a:ext cx="2544067" cy="402728"/>
+          </a:xfrm>
+          <a:prstGeom prst="rect">
+            <a:avLst/>
+          </a:prstGeom>
+          <a:noFill/>
+          <a:ln>
+            <a:noFill/>
+          </a:ln>
+        </p:spPr>
+        <p:style>
+          <a:lnRef idx="1">
+            <a:schemeClr val="accent1"/>
+          </a:lnRef>
+          <a:fillRef idx="3">
+            <a:schemeClr val="accent1"/>
+          </a:fillRef>
+          <a:effectRef idx="2">
+            <a:schemeClr val="accent1"/>
+          </a:effectRef>
+          <a:fontRef idx="minor">
+            <a:schemeClr val="lt1"/>
+          </a:fontRef>
+        </p:style>
+        <p:txBody>
+          <a:bodyPr rtlCol="0" anchor="ctr"/>
+          <a:lstStyle/>
+          <a:p>
+            <a:pPr algn="ctr"/>
           </a:p>
         </p:txBody>
       </p:sp>
